--- a/public/fun/cards/care/care-27.pptx
+++ b/public/fun/cards/care/care-27.pptx
@@ -3099,23 +3099,23 @@
       <p:grpSpPr/>
       <p:sp>
         <p:nvSpPr>
-          <p:cNvPr id="2" name="Rectangle 1"/>
+          <p:cNvPr id="2" name="Oval 1"/>
           <p:cNvSpPr/>
           <p:nvPr/>
         </p:nvSpPr>
         <p:spPr>
           <a:xfrm>
-            <a:off x="93600" y="93600"/>
-            <a:ext cx="3052800" cy="1612800"/>
+            <a:off x="1591200" y="208800"/>
+            <a:ext cx="57600" cy="57600"/>
           </a:xfrm>
-          <a:prstGeom prst="rect">
+          <a:prstGeom prst="ellipse">
             <a:avLst/>
           </a:prstGeom>
-          <a:noFill/>
-          <a:ln w="10800">
-            <a:solidFill>
-              <a:srgbClr val="CAA016"/>
-            </a:solidFill>
+          <a:solidFill>
+            <a:srgbClr val="FF6A13"/>
+          </a:solidFill>
+          <a:ln>
+            <a:noFill/>
           </a:ln>
         </p:spPr>
         <p:txBody>
@@ -3128,43 +3128,14 @@
       </p:sp>
       <p:sp>
         <p:nvSpPr>
-          <p:cNvPr id="3" name="Rectangle 2"/>
-          <p:cNvSpPr/>
+          <p:cNvPr id="3" name="텍스트"/>
+          <p:cNvSpPr txBox="1"/>
           <p:nvPr/>
         </p:nvSpPr>
         <p:spPr>
           <a:xfrm>
-            <a:off x="144000" y="144000"/>
-            <a:ext cx="2952000" cy="1512000"/>
-          </a:xfrm>
-          <a:prstGeom prst="rect">
-            <a:avLst/>
-          </a:prstGeom>
-          <a:noFill/>
-          <a:ln w="5400">
-            <a:solidFill>
-              <a:srgbClr val="FAEEC6"/>
-            </a:solidFill>
-          </a:ln>
-        </p:spPr>
-        <p:txBody>
-          <a:bodyPr rtlCol="0" anchor="ctr"/>
-          <a:lstStyle/>
-          <a:p>
-            <a:pPr algn="ctr"/>
-          </a:p>
-        </p:txBody>
-      </p:sp>
-      <p:sp>
-        <p:nvSpPr>
-          <p:cNvPr id="4" name="텍스트"/>
-          <p:cNvSpPr txBox="1"/>
-          <p:nvPr/>
-        </p:nvSpPr>
-        <p:spPr>
-          <a:xfrm>
-            <a:off x="360000" y="280800"/>
-            <a:ext cx="2520000" cy="100800"/>
+            <a:off x="360000" y="468000"/>
+            <a:ext cx="2520000" cy="360000"/>
           </a:xfrm>
           <a:prstGeom prst="rect">
             <a:avLst/>
@@ -3179,32 +3150,32 @@
           <a:p>
             <a:pPr algn="ctr">
               <a:lnSpc>
-                <a:spcPts val="1015"/>
+                <a:spcPts val="3190"/>
               </a:lnSpc>
             </a:pPr>
             <a:r>
-              <a:rPr sz="700" b="1" spc="400">
+              <a:rPr sz="2200" b="1">
                 <a:solidFill>
-                  <a:srgbClr val="81754E"/>
+                  <a:srgbClr val="12151C"/>
                 </a:solidFill>
                 <a:latin typeface="맑은 고딕"/>
                 <a:ea typeface="맑은 고딕"/>
               </a:rPr>
-              <a:t>의원 · 약국 이름</a:t>
-            </a:r>
-          </a:p>
-        </p:txBody>
-      </p:sp>
-      <p:sp>
-        <p:nvSpPr>
-          <p:cNvPr id="5" name="텍스트"/>
+              <a:t>하지안</a:t>
+            </a:r>
+          </a:p>
+        </p:txBody>
+      </p:sp>
+      <p:sp>
+        <p:nvSpPr>
+          <p:cNvPr id="4" name="텍스트"/>
           <p:cNvSpPr txBox="1"/>
           <p:nvPr/>
         </p:nvSpPr>
         <p:spPr>
           <a:xfrm>
-            <a:off x="360000" y="468000"/>
-            <a:ext cx="2520000" cy="313692"/>
+            <a:off x="360000" y="878400"/>
+            <a:ext cx="2520000" cy="171451"/>
           </a:xfrm>
           <a:prstGeom prst="rect">
             <a:avLst/>
@@ -3219,19 +3190,48 @@
           <a:p>
             <a:pPr algn="ctr">
               <a:lnSpc>
-                <a:spcPts val="2755"/>
+                <a:spcPts val="1305"/>
               </a:lnSpc>
             </a:pPr>
             <a:r>
-              <a:rPr sz="1900" b="1" spc="50">
+              <a:rPr sz="900" b="0">
                 <a:solidFill>
-                  <a:srgbClr val="6E570C"/>
+                  <a:srgbClr val="6B7280"/>
                 </a:solidFill>
                 <a:latin typeface="맑은 고딕"/>
                 <a:ea typeface="맑은 고딕"/>
               </a:rPr>
-              <a:t>하지안</a:t>
-            </a:r>
+              <a:t>치과위생사</a:t>
+            </a:r>
+          </a:p>
+        </p:txBody>
+      </p:sp>
+      <p:sp>
+        <p:nvSpPr>
+          <p:cNvPr id="5" name="Rectangle 4"/>
+          <p:cNvSpPr/>
+          <p:nvPr/>
+        </p:nvSpPr>
+        <p:spPr>
+          <a:xfrm>
+            <a:off x="1530000" y="1137600"/>
+            <a:ext cx="180000" cy="14400"/>
+          </a:xfrm>
+          <a:prstGeom prst="rect">
+            <a:avLst/>
+          </a:prstGeom>
+          <a:solidFill>
+            <a:srgbClr val="FF6A13"/>
+          </a:solidFill>
+          <a:ln>
+            <a:noFill/>
+          </a:ln>
+        </p:spPr>
+        <p:txBody>
+          <a:bodyPr rtlCol="0" anchor="ctr"/>
+          <a:lstStyle/>
+          <a:p>
+            <a:pPr algn="ctr"/>
           </a:p>
         </p:txBody>
       </p:sp>
@@ -3243,8 +3243,8 @@
         </p:nvSpPr>
         <p:spPr>
           <a:xfrm>
-            <a:off x="360000" y="784800"/>
-            <a:ext cx="2520000" cy="122400"/>
+            <a:off x="360000" y="1267200"/>
+            <a:ext cx="2520000" cy="133351"/>
           </a:xfrm>
           <a:prstGeom prst="rect">
             <a:avLst/>
@@ -3259,61 +3259,32 @@
           <a:p>
             <a:pPr algn="ctr">
               <a:lnSpc>
-                <a:spcPts val="1232"/>
+                <a:spcPts val="1015"/>
               </a:lnSpc>
             </a:pPr>
             <a:r>
-              <a:rPr sz="850" b="1">
+              <a:rPr sz="700" b="0">
                 <a:solidFill>
-                  <a:srgbClr val="8D700F"/>
+                  <a:srgbClr val="12151C"/>
                 </a:solidFill>
                 <a:latin typeface="맑은 고딕"/>
                 <a:ea typeface="맑은 고딕"/>
               </a:rPr>
-              <a:t>치과위생사</a:t>
-            </a:r>
-          </a:p>
-        </p:txBody>
-      </p:sp>
-      <p:sp>
-        <p:nvSpPr>
-          <p:cNvPr id="7" name="Rectangle 6"/>
-          <p:cNvSpPr/>
+              <a:t>010-1234-5678      name@example.com</a:t>
+            </a:r>
+          </a:p>
+        </p:txBody>
+      </p:sp>
+      <p:sp>
+        <p:nvSpPr>
+          <p:cNvPr id="7" name="텍스트"/>
+          <p:cNvSpPr txBox="1"/>
           <p:nvPr/>
         </p:nvSpPr>
         <p:spPr>
           <a:xfrm>
-            <a:off x="1530000" y="993600"/>
-            <a:ext cx="180000" cy="10800"/>
-          </a:xfrm>
-          <a:prstGeom prst="rect">
-            <a:avLst/>
-          </a:prstGeom>
-          <a:solidFill>
-            <a:srgbClr val="CAA016"/>
-          </a:solidFill>
-          <a:ln>
-            <a:noFill/>
-          </a:ln>
-        </p:spPr>
-        <p:txBody>
-          <a:bodyPr rtlCol="0" anchor="ctr"/>
-          <a:lstStyle/>
-          <a:p>
-            <a:pPr algn="ctr"/>
-          </a:p>
-        </p:txBody>
-      </p:sp>
-      <p:sp>
-        <p:nvSpPr>
-          <p:cNvPr id="8" name="텍스트"/>
-          <p:cNvSpPr txBox="1"/>
-          <p:nvPr/>
-        </p:nvSpPr>
-        <p:spPr>
-          <a:xfrm>
-            <a:off x="360000" y="1087200"/>
-            <a:ext cx="2520000" cy="108000"/>
+            <a:off x="360000" y="1425600"/>
+            <a:ext cx="2520000" cy="133351"/>
           </a:xfrm>
           <a:prstGeom prst="rect">
             <a:avLst/>
@@ -3328,32 +3299,32 @@
           <a:p>
             <a:pPr algn="ctr">
               <a:lnSpc>
-                <a:spcPts val="1087"/>
+                <a:spcPts val="1015"/>
               </a:lnSpc>
             </a:pPr>
             <a:r>
-              <a:rPr sz="750" b="0">
+              <a:rPr sz="700" b="0">
                 <a:solidFill>
-                  <a:srgbClr val="6E570C"/>
+                  <a:srgbClr val="6B7280"/>
                 </a:solidFill>
                 <a:latin typeface="맑은 고딕"/>
                 <a:ea typeface="맑은 고딕"/>
               </a:rPr>
-              <a:t>010-1234-5678</a:t>
-            </a:r>
-          </a:p>
-        </p:txBody>
-      </p:sp>
-      <p:sp>
-        <p:nvSpPr>
-          <p:cNvPr id="9" name="텍스트"/>
+              <a:t>주소를 입력해 주세요</a:t>
+            </a:r>
+          </a:p>
+        </p:txBody>
+      </p:sp>
+      <p:sp>
+        <p:nvSpPr>
+          <p:cNvPr id="8" name="텍스트"/>
           <p:cNvSpPr txBox="1"/>
           <p:nvPr/>
         </p:nvSpPr>
         <p:spPr>
           <a:xfrm>
-            <a:off x="360000" y="1209600"/>
-            <a:ext cx="2520000" cy="108000"/>
+            <a:off x="360000" y="1576800"/>
+            <a:ext cx="2520000" cy="104776"/>
           </a:xfrm>
           <a:prstGeom prst="rect">
             <a:avLst/>
@@ -3368,160 +3339,22 @@
           <a:p>
             <a:pPr algn="ctr">
               <a:lnSpc>
-                <a:spcPts val="1087"/>
+                <a:spcPts val="797"/>
               </a:lnSpc>
             </a:pPr>
             <a:r>
-              <a:rPr sz="750" b="0">
+              <a:rPr sz="550" b="1" spc="300">
                 <a:solidFill>
-                  <a:srgbClr val="6E570C"/>
+                  <a:srgbClr val="6B7280"/>
                 </a:solidFill>
                 <a:latin typeface="맑은 고딕"/>
                 <a:ea typeface="맑은 고딕"/>
               </a:rPr>
-              <a:t>name@example.com</a:t>
-            </a:r>
-          </a:p>
-        </p:txBody>
-      </p:sp>
-      <p:sp>
-        <p:nvSpPr>
-          <p:cNvPr id="10" name="텍스트"/>
-          <p:cNvSpPr txBox="1"/>
-          <p:nvPr/>
-        </p:nvSpPr>
-        <p:spPr>
-          <a:xfrm>
-            <a:off x="360000" y="1332000"/>
-            <a:ext cx="2520000" cy="108000"/>
-          </a:xfrm>
-          <a:prstGeom prst="rect">
-            <a:avLst/>
-          </a:prstGeom>
-          <a:noFill/>
-        </p:spPr>
-        <p:txBody>
-          <a:bodyPr wrap="square" lIns="0" rIns="0" tIns="0" bIns="0" anchor="t">
-            <a:spAutoFit/>
-          </a:bodyPr>
-          <a:lstStyle/>
-          <a:p>
-            <a:pPr algn="ctr">
-              <a:lnSpc>
-                <a:spcPts val="1015"/>
-              </a:lnSpc>
-            </a:pPr>
-            <a:r>
-              <a:rPr sz="700" b="0">
-                <a:solidFill>
-                  <a:srgbClr val="81754E"/>
-                </a:solidFill>
-                <a:latin typeface="맑은 고딕"/>
-                <a:ea typeface="맑은 고딕"/>
-              </a:rPr>
-              <a:t>주소를 입력해 주세요</a:t>
-            </a:r>
-          </a:p>
-        </p:txBody>
-      </p:sp>
-      <p:sp>
-        <p:nvSpPr>
-          <p:cNvPr id="11" name="Freeform 10"/>
-          <p:cNvSpPr/>
-          <p:nvPr/>
-        </p:nvSpPr>
-        <p:spPr>
-          <a:xfrm>
-            <a:off x="1573488" y="1485072"/>
-            <a:ext cx="93024" cy="123120"/>
-          </a:xfrm>
-          <a:custGeom>
-            <a:avLst/>
-            <a:gdLst/>
-            <a:ahLst/>
-            <a:cxnLst/>
-            <a:rect l="l" t="t" r="r" b="b"/>
-            <a:pathLst>
-              <a:path w="93024" h="123120">
-                <a:moveTo>
-                  <a:pt x="0" y="13680"/>
-                </a:moveTo>
-                <a:lnTo>
-                  <a:pt x="46512" y="0"/>
-                </a:lnTo>
-                <a:lnTo>
-                  <a:pt x="93024" y="13680"/>
-                </a:lnTo>
-                <a:lnTo>
-                  <a:pt x="93024" y="65664"/>
-                </a:lnTo>
-                <a:lnTo>
-                  <a:pt x="46512" y="123120"/>
-                </a:lnTo>
-                <a:lnTo>
-                  <a:pt x="0" y="65664"/>
-                </a:lnTo>
-                <a:close/>
-              </a:path>
-            </a:pathLst>
-          </a:custGeom>
-          <a:solidFill>
-            <a:srgbClr val="CAA016"/>
-          </a:solidFill>
-          <a:ln>
-            <a:noFill/>
-          </a:ln>
-        </p:spPr>
-        <p:txBody>
-          <a:bodyPr rtlCol="0" anchor="ctr"/>
-          <a:lstStyle/>
-          <a:p>
-            <a:pPr algn="ctr"/>
-          </a:p>
-        </p:txBody>
-      </p:sp>
-      <p:cxnSp>
-        <p:nvCxnSpPr>
-          <p:cNvPr id="12" name="Connector 11"/>
-          <p:cNvCxnSpPr/>
-          <p:nvPr/>
-        </p:nvCxnSpPr>
-        <p:spPr>
-          <a:xfrm>
-            <a:off x="1600848" y="1548000"/>
-            <a:ext cx="15048" cy="16416"/>
-          </a:xfrm>
-          <a:prstGeom prst="line">
-            <a:avLst/>
-          </a:prstGeom>
-          <a:ln w="9576">
-            <a:solidFill>
-              <a:srgbClr val="FAEEC6"/>
-            </a:solidFill>
-          </a:ln>
-        </p:spPr>
-      </p:cxnSp>
-      <p:cxnSp>
-        <p:nvCxnSpPr>
-          <p:cNvPr id="13" name="Connector 12"/>
-          <p:cNvCxnSpPr/>
-          <p:nvPr/>
-        </p:nvCxnSpPr>
-        <p:spPr>
-          <a:xfrm flipV="1">
-            <a:off x="1615896" y="1531584"/>
-            <a:ext cx="25992" cy="32832"/>
-          </a:xfrm>
-          <a:prstGeom prst="line">
-            <a:avLst/>
-          </a:prstGeom>
-          <a:ln w="9576">
-            <a:solidFill>
-              <a:srgbClr val="FAEEC6"/>
-            </a:solidFill>
-          </a:ln>
-        </p:spPr>
-      </p:cxnSp>
+              <a:t>의원 · 약국 이름</a:t>
+            </a:r>
+          </a:p>
+        </p:txBody>
+      </p:sp>
     </p:spTree>
   </p:cSld>
   <p:clrMapOvr>
@@ -3536,7 +3369,7 @@
     <p:bg>
       <p:bgPr>
         <a:solidFill>
-          <a:srgbClr val="EEF7FB"/>
+          <a:srgbClr val="FFF0E7"/>
         </a:solidFill>
         <a:effectLst/>
       </p:bgPr>
@@ -3557,13 +3390,13 @@
         <p:spPr>
           <a:xfrm>
             <a:off x="0" y="0"/>
-            <a:ext cx="1224000" cy="1800000"/>
+            <a:ext cx="3240000" cy="1800000"/>
           </a:xfrm>
           <a:prstGeom prst="rect">
             <a:avLst/>
           </a:prstGeom>
           <a:solidFill>
-            <a:srgbClr val="25799D"/>
+            <a:srgbClr val="FF6A13"/>
           </a:solidFill>
           <a:ln>
             <a:noFill/>
@@ -3585,8 +3418,8 @@
         </p:nvSpPr>
         <p:spPr>
           <a:xfrm>
-            <a:off x="428400" y="651600"/>
-            <a:ext cx="367200" cy="486000"/>
+            <a:off x="2412000" y="972000"/>
+            <a:ext cx="828000" cy="828000"/>
           </a:xfrm>
           <a:custGeom>
             <a:avLst/>
@@ -3595,31 +3428,91 @@
             <a:cxnLst/>
             <a:rect l="l" t="t" r="r" b="b"/>
             <a:pathLst>
-              <a:path w="367200" h="486000">
+              <a:path w="828000" h="828000">
                 <a:moveTo>
-                  <a:pt x="0" y="54000"/>
+                  <a:pt x="828000" y="828000"/>
                 </a:moveTo>
                 <a:lnTo>
-                  <a:pt x="183600" y="0"/>
+                  <a:pt x="0" y="828000"/>
                 </a:lnTo>
                 <a:lnTo>
-                  <a:pt x="367200" y="54000"/>
+                  <a:pt x="1773" y="773846"/>
                 </a:lnTo>
                 <a:lnTo>
-                  <a:pt x="367200" y="259200"/>
+                  <a:pt x="7084" y="719924"/>
                 </a:lnTo>
                 <a:lnTo>
-                  <a:pt x="183600" y="486000"/>
+                  <a:pt x="15910" y="666465"/>
                 </a:lnTo>
                 <a:lnTo>
-                  <a:pt x="0" y="259200"/>
+                  <a:pt x="28213" y="613698"/>
+                </a:lnTo>
+                <a:lnTo>
+                  <a:pt x="43942" y="561848"/>
+                </a:lnTo>
+                <a:lnTo>
+                  <a:pt x="63028" y="511138"/>
+                </a:lnTo>
+                <a:lnTo>
+                  <a:pt x="85389" y="461785"/>
+                </a:lnTo>
+                <a:lnTo>
+                  <a:pt x="110931" y="414000"/>
+                </a:lnTo>
+                <a:lnTo>
+                  <a:pt x="139543" y="367988"/>
+                </a:lnTo>
+                <a:lnTo>
+                  <a:pt x="171103" y="323946"/>
+                </a:lnTo>
+                <a:lnTo>
+                  <a:pt x="205477" y="282062"/>
+                </a:lnTo>
+                <a:lnTo>
+                  <a:pt x="242516" y="242516"/>
+                </a:lnTo>
+                <a:lnTo>
+                  <a:pt x="282062" y="205477"/>
+                </a:lnTo>
+                <a:lnTo>
+                  <a:pt x="323946" y="171103"/>
+                </a:lnTo>
+                <a:lnTo>
+                  <a:pt x="367988" y="139543"/>
+                </a:lnTo>
+                <a:lnTo>
+                  <a:pt x="414000" y="110931"/>
+                </a:lnTo>
+                <a:lnTo>
+                  <a:pt x="461785" y="85389"/>
+                </a:lnTo>
+                <a:lnTo>
+                  <a:pt x="511138" y="63028"/>
+                </a:lnTo>
+                <a:lnTo>
+                  <a:pt x="561848" y="43942"/>
+                </a:lnTo>
+                <a:lnTo>
+                  <a:pt x="613698" y="28213"/>
+                </a:lnTo>
+                <a:lnTo>
+                  <a:pt x="666465" y="15910"/>
+                </a:lnTo>
+                <a:lnTo>
+                  <a:pt x="719924" y="7084"/>
+                </a:lnTo>
+                <a:lnTo>
+                  <a:pt x="773846" y="1773"/>
+                </a:lnTo>
+                <a:lnTo>
+                  <a:pt x="828000" y="0"/>
                 </a:lnTo>
                 <a:close/>
               </a:path>
             </a:pathLst>
           </a:custGeom>
           <a:solidFill>
-            <a:srgbClr val="FFFFFF"/>
+            <a:srgbClr val="FF8B47"/>
           </a:solidFill>
           <a:ln>
             <a:noFill/>
@@ -3633,58 +3526,16 @@
           </a:p>
         </p:txBody>
       </p:sp>
-      <p:cxnSp>
-        <p:nvCxnSpPr>
-          <p:cNvPr id="4" name="Connector 3"/>
-          <p:cNvCxnSpPr/>
+      <p:sp>
+        <p:nvSpPr>
+          <p:cNvPr id="4" name="텍스트"/>
+          <p:cNvSpPr txBox="1"/>
           <p:nvPr/>
-        </p:nvCxnSpPr>
+        </p:nvSpPr>
         <p:spPr>
           <a:xfrm>
-            <a:off x="536400" y="900000"/>
-            <a:ext cx="59400" cy="64800"/>
-          </a:xfrm>
-          <a:prstGeom prst="line">
-            <a:avLst/>
-          </a:prstGeom>
-          <a:ln w="37800">
-            <a:solidFill>
-              <a:srgbClr val="808080"/>
-            </a:solidFill>
-          </a:ln>
-        </p:spPr>
-      </p:cxnSp>
-      <p:cxnSp>
-        <p:nvCxnSpPr>
-          <p:cNvPr id="5" name="Connector 4"/>
-          <p:cNvCxnSpPr/>
-          <p:nvPr/>
-        </p:nvCxnSpPr>
-        <p:spPr>
-          <a:xfrm flipV="1">
-            <a:off x="595800" y="835200"/>
-            <a:ext cx="102600" cy="129600"/>
-          </a:xfrm>
-          <a:prstGeom prst="line">
-            <a:avLst/>
-          </a:prstGeom>
-          <a:ln w="37800">
-            <a:solidFill>
-              <a:srgbClr val="808080"/>
-            </a:solidFill>
-          </a:ln>
-        </p:spPr>
-      </p:cxnSp>
-      <p:sp>
-        <p:nvSpPr>
-          <p:cNvPr id="6" name="텍스트"/>
-          <p:cNvSpPr txBox="1"/>
-          <p:nvPr/>
-        </p:nvSpPr>
-        <p:spPr>
-          <a:xfrm>
-            <a:off x="1440000" y="432000"/>
-            <a:ext cx="1584000" cy="792000"/>
+            <a:off x="252000" y="432000"/>
+            <a:ext cx="2304000" cy="720000"/>
           </a:xfrm>
           <a:prstGeom prst="rect">
             <a:avLst/>
@@ -3692,85 +3543,39 @@
           <a:noFill/>
         </p:spPr>
         <p:txBody>
-          <a:bodyPr wrap="square" lIns="0" rIns="0" tIns="0" bIns="0" anchor="ctr">
+          <a:bodyPr wrap="square" lIns="0" rIns="0" tIns="0" bIns="0" anchor="t">
             <a:spAutoFit/>
           </a:bodyPr>
           <a:lstStyle/>
           <a:p>
             <a:pPr algn="l">
               <a:lnSpc>
-                <a:spcPts val="1667"/>
+                <a:spcPts val="1884"/>
               </a:lnSpc>
             </a:pPr>
             <a:r>
-              <a:rPr sz="1150" b="1">
+              <a:rPr sz="1300" b="1">
                 <a:solidFill>
-                  <a:srgbClr val="11394A"/>
+                  <a:srgbClr val="12151C"/>
                 </a:solidFill>
                 <a:latin typeface="맑은 고딕"/>
                 <a:ea typeface="맑은 고딕"/>
               </a:rPr>
-              <a:t>돌봄은 존중에서</a:t>
-            </a:r>
-          </a:p>
-          <a:p>
-            <a:pPr algn="l">
-              <a:lnSpc>
-                <a:spcPts val="1667"/>
-              </a:lnSpc>
-            </a:pPr>
-            <a:r>
-              <a:rPr sz="1150" b="1">
-                <a:solidFill>
-                  <a:srgbClr val="11394A"/>
-                </a:solidFill>
-                <a:latin typeface="맑은 고딕"/>
-                <a:ea typeface="맑은 고딕"/>
-              </a:rPr>
-              <a:t>시작됩니다</a:t>
-            </a:r>
-          </a:p>
-        </p:txBody>
-      </p:sp>
-      <p:sp>
-        <p:nvSpPr>
-          <p:cNvPr id="7" name="Rectangle 6"/>
-          <p:cNvSpPr/>
+              <a:t>돌봄은 존중에서 시작됩니다</a:t>
+            </a:r>
+          </a:p>
+        </p:txBody>
+      </p:sp>
+      <p:sp>
+        <p:nvSpPr>
+          <p:cNvPr id="5" name="텍스트"/>
+          <p:cNvSpPr txBox="1"/>
           <p:nvPr/>
         </p:nvSpPr>
         <p:spPr>
           <a:xfrm>
-            <a:off x="1440000" y="1317600"/>
-            <a:ext cx="180000" cy="10800"/>
-          </a:xfrm>
-          <a:prstGeom prst="rect">
-            <a:avLst/>
-          </a:prstGeom>
-          <a:solidFill>
-            <a:srgbClr val="25799D"/>
-          </a:solidFill>
-          <a:ln>
-            <a:noFill/>
-          </a:ln>
-        </p:spPr>
-        <p:txBody>
-          <a:bodyPr rtlCol="0" anchor="ctr"/>
-          <a:lstStyle/>
-          <a:p>
-            <a:pPr algn="ctr"/>
-          </a:p>
-        </p:txBody>
-      </p:sp>
-      <p:sp>
-        <p:nvSpPr>
-          <p:cNvPr id="8" name="텍스트"/>
-          <p:cNvSpPr txBox="1"/>
-          <p:nvPr/>
-        </p:nvSpPr>
-        <p:spPr>
-          <a:xfrm>
-            <a:off x="1440000" y="1418400"/>
-            <a:ext cx="1584000" cy="108000"/>
+            <a:off x="252000" y="1476000"/>
+            <a:ext cx="1800000" cy="133351"/>
           </a:xfrm>
           <a:prstGeom prst="rect">
             <a:avLst/>
@@ -3785,13 +3590,13 @@
           <a:p>
             <a:pPr algn="l">
               <a:lnSpc>
-                <a:spcPts val="1087"/>
+                <a:spcPts val="1015"/>
               </a:lnSpc>
             </a:pPr>
             <a:r>
-              <a:rPr sz="750" b="1" spc="200">
+              <a:rPr sz="700" b="1" spc="200">
                 <a:solidFill>
-                  <a:srgbClr val="597581"/>
+                  <a:srgbClr val="12151C"/>
                 </a:solidFill>
                 <a:latin typeface="맑은 고딕"/>
                 <a:ea typeface="맑은 고딕"/>

--- a/public/fun/cards/care/care-27.pptx
+++ b/public/fun/cards/care/care-27.pptx
@@ -3097,25 +3097,193 @@
         <p:nvPr/>
       </p:nvGrpSpPr>
       <p:grpSpPr/>
-      <p:sp>
-        <p:nvSpPr>
-          <p:cNvPr id="2" name="Oval 1"/>
+      <p:cxnSp>
+        <p:nvCxnSpPr>
+          <p:cNvPr id="2" name="Connector 1"/>
+          <p:cNvCxnSpPr/>
+          <p:nvPr/>
+        </p:nvCxnSpPr>
+        <p:spPr>
+          <a:xfrm>
+            <a:off x="93600" y="122400"/>
+            <a:ext cx="57600" cy="0"/>
+          </a:xfrm>
+          <a:prstGeom prst="line">
+            <a:avLst/>
+          </a:prstGeom>
+          <a:ln w="3600">
+            <a:solidFill>
+              <a:srgbClr val="E3E5E9"/>
+            </a:solidFill>
+          </a:ln>
+        </p:spPr>
+      </p:cxnSp>
+      <p:cxnSp>
+        <p:nvCxnSpPr>
+          <p:cNvPr id="3" name="Connector 2"/>
+          <p:cNvCxnSpPr/>
+          <p:nvPr/>
+        </p:nvCxnSpPr>
+        <p:spPr>
+          <a:xfrm>
+            <a:off x="122400" y="93600"/>
+            <a:ext cx="0" cy="57600"/>
+          </a:xfrm>
+          <a:prstGeom prst="line">
+            <a:avLst/>
+          </a:prstGeom>
+          <a:ln w="3600">
+            <a:solidFill>
+              <a:srgbClr val="E3E5E9"/>
+            </a:solidFill>
+          </a:ln>
+        </p:spPr>
+      </p:cxnSp>
+      <p:cxnSp>
+        <p:nvCxnSpPr>
+          <p:cNvPr id="4" name="Connector 3"/>
+          <p:cNvCxnSpPr/>
+          <p:nvPr/>
+        </p:nvCxnSpPr>
+        <p:spPr>
+          <a:xfrm>
+            <a:off x="3088800" y="122400"/>
+            <a:ext cx="57600" cy="0"/>
+          </a:xfrm>
+          <a:prstGeom prst="line">
+            <a:avLst/>
+          </a:prstGeom>
+          <a:ln w="3600">
+            <a:solidFill>
+              <a:srgbClr val="E3E5E9"/>
+            </a:solidFill>
+          </a:ln>
+        </p:spPr>
+      </p:cxnSp>
+      <p:cxnSp>
+        <p:nvCxnSpPr>
+          <p:cNvPr id="5" name="Connector 4"/>
+          <p:cNvCxnSpPr/>
+          <p:nvPr/>
+        </p:nvCxnSpPr>
+        <p:spPr>
+          <a:xfrm>
+            <a:off x="3117600" y="93600"/>
+            <a:ext cx="0" cy="57600"/>
+          </a:xfrm>
+          <a:prstGeom prst="line">
+            <a:avLst/>
+          </a:prstGeom>
+          <a:ln w="3600">
+            <a:solidFill>
+              <a:srgbClr val="E3E5E9"/>
+            </a:solidFill>
+          </a:ln>
+        </p:spPr>
+      </p:cxnSp>
+      <p:cxnSp>
+        <p:nvCxnSpPr>
+          <p:cNvPr id="6" name="Connector 5"/>
+          <p:cNvCxnSpPr/>
+          <p:nvPr/>
+        </p:nvCxnSpPr>
+        <p:spPr>
+          <a:xfrm>
+            <a:off x="93600" y="1677600"/>
+            <a:ext cx="57600" cy="0"/>
+          </a:xfrm>
+          <a:prstGeom prst="line">
+            <a:avLst/>
+          </a:prstGeom>
+          <a:ln w="3600">
+            <a:solidFill>
+              <a:srgbClr val="E3E5E9"/>
+            </a:solidFill>
+          </a:ln>
+        </p:spPr>
+      </p:cxnSp>
+      <p:cxnSp>
+        <p:nvCxnSpPr>
+          <p:cNvPr id="7" name="Connector 6"/>
+          <p:cNvCxnSpPr/>
+          <p:nvPr/>
+        </p:nvCxnSpPr>
+        <p:spPr>
+          <a:xfrm>
+            <a:off x="122400" y="1648800"/>
+            <a:ext cx="0" cy="57600"/>
+          </a:xfrm>
+          <a:prstGeom prst="line">
+            <a:avLst/>
+          </a:prstGeom>
+          <a:ln w="3600">
+            <a:solidFill>
+              <a:srgbClr val="E3E5E9"/>
+            </a:solidFill>
+          </a:ln>
+        </p:spPr>
+      </p:cxnSp>
+      <p:cxnSp>
+        <p:nvCxnSpPr>
+          <p:cNvPr id="8" name="Connector 7"/>
+          <p:cNvCxnSpPr/>
+          <p:nvPr/>
+        </p:nvCxnSpPr>
+        <p:spPr>
+          <a:xfrm>
+            <a:off x="3088800" y="1677600"/>
+            <a:ext cx="57600" cy="0"/>
+          </a:xfrm>
+          <a:prstGeom prst="line">
+            <a:avLst/>
+          </a:prstGeom>
+          <a:ln w="3600">
+            <a:solidFill>
+              <a:srgbClr val="E3E5E9"/>
+            </a:solidFill>
+          </a:ln>
+        </p:spPr>
+      </p:cxnSp>
+      <p:cxnSp>
+        <p:nvCxnSpPr>
+          <p:cNvPr id="9" name="Connector 8"/>
+          <p:cNvCxnSpPr/>
+          <p:nvPr/>
+        </p:nvCxnSpPr>
+        <p:spPr>
+          <a:xfrm>
+            <a:off x="3117600" y="1648800"/>
+            <a:ext cx="0" cy="57600"/>
+          </a:xfrm>
+          <a:prstGeom prst="line">
+            <a:avLst/>
+          </a:prstGeom>
+          <a:ln w="3600">
+            <a:solidFill>
+              <a:srgbClr val="E3E5E9"/>
+            </a:solidFill>
+          </a:ln>
+        </p:spPr>
+      </p:cxnSp>
+      <p:sp>
+        <p:nvSpPr>
+          <p:cNvPr id="10" name="Oval 9"/>
           <p:cNvSpPr/>
           <p:nvPr/>
         </p:nvSpPr>
         <p:spPr>
           <a:xfrm>
-            <a:off x="1591200" y="208800"/>
-            <a:ext cx="57600" cy="57600"/>
+            <a:off x="1526400" y="237600"/>
+            <a:ext cx="187200" cy="187200"/>
           </a:xfrm>
           <a:prstGeom prst="ellipse">
             <a:avLst/>
           </a:prstGeom>
-          <a:solidFill>
-            <a:srgbClr val="FF6A13"/>
-          </a:solidFill>
-          <a:ln>
-            <a:noFill/>
+          <a:noFill/>
+          <a:ln w="5040">
+            <a:solidFill>
+              <a:srgbClr val="FF6A13"/>
+            </a:solidFill>
           </a:ln>
         </p:spPr>
         <p:txBody>
@@ -3128,14 +3296,14 @@
       </p:sp>
       <p:sp>
         <p:nvSpPr>
-          <p:cNvPr id="3" name="텍스트"/>
+          <p:cNvPr id="11" name="텍스트"/>
           <p:cNvSpPr txBox="1"/>
           <p:nvPr/>
         </p:nvSpPr>
         <p:spPr>
           <a:xfrm>
-            <a:off x="360000" y="468000"/>
-            <a:ext cx="2520000" cy="360000"/>
+            <a:off x="1476000" y="237600"/>
+            <a:ext cx="288000" cy="187200"/>
           </a:xfrm>
           <a:prstGeom prst="rect">
             <a:avLst/>
@@ -3143,6 +3311,46 @@
           <a:noFill/>
         </p:spPr>
         <p:txBody>
+          <a:bodyPr wrap="square" lIns="0" rIns="0" tIns="0" bIns="0" anchor="ctr">
+            <a:spAutoFit/>
+          </a:bodyPr>
+          <a:lstStyle/>
+          <a:p>
+            <a:pPr algn="ctr">
+              <a:lnSpc>
+                <a:spcPts val="1305"/>
+              </a:lnSpc>
+            </a:pPr>
+            <a:r>
+              <a:rPr sz="900" b="1">
+                <a:solidFill>
+                  <a:srgbClr val="FF6A13"/>
+                </a:solidFill>
+                <a:latin typeface="맑은 고딕"/>
+                <a:ea typeface="맑은 고딕"/>
+              </a:rPr>
+              <a:t>의</a:t>
+            </a:r>
+          </a:p>
+        </p:txBody>
+      </p:sp>
+      <p:sp>
+        <p:nvSpPr>
+          <p:cNvPr id="12" name="텍스트"/>
+          <p:cNvSpPr txBox="1"/>
+          <p:nvPr/>
+        </p:nvSpPr>
+        <p:spPr>
+          <a:xfrm>
+            <a:off x="360000" y="540000"/>
+            <a:ext cx="2520000" cy="237600"/>
+          </a:xfrm>
+          <a:prstGeom prst="rect">
+            <a:avLst/>
+          </a:prstGeom>
+          <a:noFill/>
+        </p:spPr>
+        <p:txBody>
           <a:bodyPr wrap="square" lIns="0" rIns="0" tIns="0" bIns="0" anchor="t">
             <a:spAutoFit/>
           </a:bodyPr>
@@ -3150,11 +3358,11 @@
           <a:p>
             <a:pPr algn="ctr">
               <a:lnSpc>
-                <a:spcPts val="3190"/>
+                <a:spcPts val="1957"/>
               </a:lnSpc>
             </a:pPr>
             <a:r>
-              <a:rPr sz="2200" b="1">
+              <a:rPr sz="1350" b="1" spc="120">
                 <a:solidFill>
                   <a:srgbClr val="12151C"/>
                 </a:solidFill>
@@ -3168,14 +3376,14 @@
       </p:sp>
       <p:sp>
         <p:nvSpPr>
-          <p:cNvPr id="4" name="텍스트"/>
+          <p:cNvPr id="13" name="텍스트"/>
           <p:cNvSpPr txBox="1"/>
           <p:nvPr/>
         </p:nvSpPr>
         <p:spPr>
           <a:xfrm>
-            <a:off x="360000" y="878400"/>
-            <a:ext cx="2520000" cy="171451"/>
+            <a:off x="360000" y="792000"/>
+            <a:ext cx="2520000" cy="133351"/>
           </a:xfrm>
           <a:prstGeom prst="rect">
             <a:avLst/>
@@ -3190,11 +3398,11 @@
           <a:p>
             <a:pPr algn="ctr">
               <a:lnSpc>
-                <a:spcPts val="1305"/>
+                <a:spcPts val="1015"/>
               </a:lnSpc>
             </a:pPr>
             <a:r>
-              <a:rPr sz="900" b="0">
+              <a:rPr sz="700" b="0" spc="60">
                 <a:solidFill>
                   <a:srgbClr val="6B7280"/>
                 </a:solidFill>
@@ -3206,45 +3414,37 @@
           </a:p>
         </p:txBody>
       </p:sp>
-      <p:sp>
-        <p:nvSpPr>
-          <p:cNvPr id="5" name="Rectangle 4"/>
-          <p:cNvSpPr/>
+      <p:cxnSp>
+        <p:nvCxnSpPr>
+          <p:cNvPr id="14" name="Connector 13"/>
+          <p:cNvCxnSpPr/>
           <p:nvPr/>
-        </p:nvSpPr>
-        <p:spPr>
-          <a:xfrm>
-            <a:off x="1530000" y="1137600"/>
-            <a:ext cx="180000" cy="14400"/>
-          </a:xfrm>
-          <a:prstGeom prst="rect">
+        </p:nvCxnSpPr>
+        <p:spPr>
+          <a:xfrm>
+            <a:off x="1440000" y="1015200"/>
+            <a:ext cx="360000" cy="0"/>
+          </a:xfrm>
+          <a:prstGeom prst="line">
             <a:avLst/>
           </a:prstGeom>
-          <a:solidFill>
-            <a:srgbClr val="FF6A13"/>
-          </a:solidFill>
-          <a:ln>
-            <a:noFill/>
+          <a:ln w="7920">
+            <a:solidFill>
+              <a:srgbClr val="FF6A13"/>
+            </a:solidFill>
           </a:ln>
         </p:spPr>
-        <p:txBody>
-          <a:bodyPr rtlCol="0" anchor="ctr"/>
-          <a:lstStyle/>
-          <a:p>
-            <a:pPr algn="ctr"/>
-          </a:p>
-        </p:txBody>
-      </p:sp>
-      <p:sp>
-        <p:nvSpPr>
-          <p:cNvPr id="6" name="텍스트"/>
+      </p:cxnSp>
+      <p:sp>
+        <p:nvSpPr>
+          <p:cNvPr id="15" name="텍스트"/>
           <p:cNvSpPr txBox="1"/>
           <p:nvPr/>
         </p:nvSpPr>
         <p:spPr>
           <a:xfrm>
-            <a:off x="360000" y="1267200"/>
-            <a:ext cx="2520000" cy="133351"/>
+            <a:off x="360000" y="1101600"/>
+            <a:ext cx="2520000" cy="123826"/>
           </a:xfrm>
           <a:prstGeom prst="rect">
             <a:avLst/>
@@ -3259,32 +3459,72 @@
           <a:p>
             <a:pPr algn="ctr">
               <a:lnSpc>
-                <a:spcPts val="1015"/>
+                <a:spcPts val="942"/>
               </a:lnSpc>
             </a:pPr>
             <a:r>
-              <a:rPr sz="700" b="0">
+              <a:rPr sz="650" b="1" spc="220">
+                <a:solidFill>
+                  <a:srgbClr val="6B7280"/>
+                </a:solidFill>
+                <a:latin typeface="맑은 고딕"/>
+                <a:ea typeface="맑은 고딕"/>
+              </a:rPr>
+              <a:t>의원 · 약국 이름</a:t>
+            </a:r>
+          </a:p>
+        </p:txBody>
+      </p:sp>
+      <p:sp>
+        <p:nvSpPr>
+          <p:cNvPr id="16" name="텍스트"/>
+          <p:cNvSpPr txBox="1"/>
+          <p:nvPr/>
+        </p:nvSpPr>
+        <p:spPr>
+          <a:xfrm>
+            <a:off x="360000" y="1339200"/>
+            <a:ext cx="2520000" cy="123826"/>
+          </a:xfrm>
+          <a:prstGeom prst="rect">
+            <a:avLst/>
+          </a:prstGeom>
+          <a:noFill/>
+        </p:spPr>
+        <p:txBody>
+          <a:bodyPr wrap="square" lIns="0" rIns="0" tIns="0" bIns="0" anchor="t">
+            <a:spAutoFit/>
+          </a:bodyPr>
+          <a:lstStyle/>
+          <a:p>
+            <a:pPr algn="ctr">
+              <a:lnSpc>
+                <a:spcPts val="942"/>
+              </a:lnSpc>
+            </a:pPr>
+            <a:r>
+              <a:rPr sz="650" b="0">
                 <a:solidFill>
                   <a:srgbClr val="12151C"/>
                 </a:solidFill>
                 <a:latin typeface="맑은 고딕"/>
                 <a:ea typeface="맑은 고딕"/>
               </a:rPr>
-              <a:t>010-1234-5678      name@example.com</a:t>
-            </a:r>
-          </a:p>
-        </p:txBody>
-      </p:sp>
-      <p:sp>
-        <p:nvSpPr>
-          <p:cNvPr id="7" name="텍스트"/>
+              <a:t>010-1234-5678     |     name@example.com</a:t>
+            </a:r>
+          </a:p>
+        </p:txBody>
+      </p:sp>
+      <p:sp>
+        <p:nvSpPr>
+          <p:cNvPr id="17" name="텍스트"/>
           <p:cNvSpPr txBox="1"/>
           <p:nvPr/>
         </p:nvSpPr>
         <p:spPr>
           <a:xfrm>
-            <a:off x="360000" y="1425600"/>
-            <a:ext cx="2520000" cy="133351"/>
+            <a:off x="360000" y="1476000"/>
+            <a:ext cx="2520000" cy="123826"/>
           </a:xfrm>
           <a:prstGeom prst="rect">
             <a:avLst/>
@@ -3299,11 +3539,11 @@
           <a:p>
             <a:pPr algn="ctr">
               <a:lnSpc>
-                <a:spcPts val="1015"/>
+                <a:spcPts val="942"/>
               </a:lnSpc>
             </a:pPr>
             <a:r>
-              <a:rPr sz="700" b="0">
+              <a:rPr sz="650" b="0">
                 <a:solidFill>
                   <a:srgbClr val="6B7280"/>
                 </a:solidFill>
@@ -3311,46 +3551,6 @@
                 <a:ea typeface="맑은 고딕"/>
               </a:rPr>
               <a:t>주소를 입력해 주세요</a:t>
-            </a:r>
-          </a:p>
-        </p:txBody>
-      </p:sp>
-      <p:sp>
-        <p:nvSpPr>
-          <p:cNvPr id="8" name="텍스트"/>
-          <p:cNvSpPr txBox="1"/>
-          <p:nvPr/>
-        </p:nvSpPr>
-        <p:spPr>
-          <a:xfrm>
-            <a:off x="360000" y="1576800"/>
-            <a:ext cx="2520000" cy="104776"/>
-          </a:xfrm>
-          <a:prstGeom prst="rect">
-            <a:avLst/>
-          </a:prstGeom>
-          <a:noFill/>
-        </p:spPr>
-        <p:txBody>
-          <a:bodyPr wrap="square" lIns="0" rIns="0" tIns="0" bIns="0" anchor="t">
-            <a:spAutoFit/>
-          </a:bodyPr>
-          <a:lstStyle/>
-          <a:p>
-            <a:pPr algn="ctr">
-              <a:lnSpc>
-                <a:spcPts val="797"/>
-              </a:lnSpc>
-            </a:pPr>
-            <a:r>
-              <a:rPr sz="550" b="1" spc="300">
-                <a:solidFill>
-                  <a:srgbClr val="6B7280"/>
-                </a:solidFill>
-                <a:latin typeface="맑은 고딕"/>
-                <a:ea typeface="맑은 고딕"/>
-              </a:rPr>
-              <a:t>의원 · 약국 이름</a:t>
             </a:r>
           </a:p>
         </p:txBody>
@@ -3383,14 +3583,54 @@
       <p:grpSpPr/>
       <p:sp>
         <p:nvSpPr>
-          <p:cNvPr id="2" name="Rectangle 1"/>
+          <p:cNvPr id="2" name="텍스트"/>
+          <p:cNvSpPr txBox="1"/>
+          <p:nvPr/>
+        </p:nvSpPr>
+        <p:spPr>
+          <a:xfrm>
+            <a:off x="252000" y="252000"/>
+            <a:ext cx="1080000" cy="99061"/>
+          </a:xfrm>
+          <a:prstGeom prst="rect">
+            <a:avLst/>
+          </a:prstGeom>
+          <a:noFill/>
+        </p:spPr>
+        <p:txBody>
+          <a:bodyPr wrap="square" lIns="0" rIns="0" tIns="0" bIns="0" anchor="t">
+            <a:spAutoFit/>
+          </a:bodyPr>
+          <a:lstStyle/>
+          <a:p>
+            <a:pPr algn="l">
+              <a:lnSpc>
+                <a:spcPts val="754"/>
+              </a:lnSpc>
+            </a:pPr>
+            <a:r>
+              <a:rPr sz="520" b="1" spc="240">
+                <a:solidFill>
+                  <a:srgbClr val="6C3519"/>
+                </a:solidFill>
+                <a:latin typeface="맑은 고딕"/>
+                <a:ea typeface="맑은 고딕"/>
+              </a:rPr>
+              <a:t>진료 · 상담</a:t>
+            </a:r>
+          </a:p>
+        </p:txBody>
+      </p:sp>
+      <p:sp>
+        <p:nvSpPr>
+          <p:cNvPr id="3" name="Rectangle 2"/>
           <p:cNvSpPr/>
           <p:nvPr/>
         </p:nvSpPr>
         <p:spPr>
           <a:xfrm>
-            <a:off x="0" y="0"/>
-            <a:ext cx="3240000" cy="1800000"/>
+            <a:off x="252000" y="352800"/>
+            <a:ext cx="108000" cy="14400"/>
           </a:xfrm>
           <a:prstGeom prst="rect">
             <a:avLst/>
@@ -3410,132 +3650,37 @@
           </a:p>
         </p:txBody>
       </p:sp>
-      <p:sp>
-        <p:nvSpPr>
-          <p:cNvPr id="3" name="Freeform 2"/>
-          <p:cNvSpPr/>
+      <p:cxnSp>
+        <p:nvCxnSpPr>
+          <p:cNvPr id="4" name="Connector 3"/>
+          <p:cNvCxnSpPr/>
           <p:nvPr/>
-        </p:nvSpPr>
-        <p:spPr>
-          <a:xfrm>
-            <a:off x="2412000" y="972000"/>
-            <a:ext cx="828000" cy="828000"/>
-          </a:xfrm>
-          <a:custGeom>
+        </p:nvCxnSpPr>
+        <p:spPr>
+          <a:xfrm>
+            <a:off x="252000" y="453600"/>
+            <a:ext cx="1512000" cy="0"/>
+          </a:xfrm>
+          <a:prstGeom prst="line">
             <a:avLst/>
-            <a:gdLst/>
-            <a:ahLst/>
-            <a:cxnLst/>
-            <a:rect l="l" t="t" r="r" b="b"/>
-            <a:pathLst>
-              <a:path w="828000" h="828000">
-                <a:moveTo>
-                  <a:pt x="828000" y="828000"/>
-                </a:moveTo>
-                <a:lnTo>
-                  <a:pt x="0" y="828000"/>
-                </a:lnTo>
-                <a:lnTo>
-                  <a:pt x="1773" y="773846"/>
-                </a:lnTo>
-                <a:lnTo>
-                  <a:pt x="7084" y="719924"/>
-                </a:lnTo>
-                <a:lnTo>
-                  <a:pt x="15910" y="666465"/>
-                </a:lnTo>
-                <a:lnTo>
-                  <a:pt x="28213" y="613698"/>
-                </a:lnTo>
-                <a:lnTo>
-                  <a:pt x="43942" y="561848"/>
-                </a:lnTo>
-                <a:lnTo>
-                  <a:pt x="63028" y="511138"/>
-                </a:lnTo>
-                <a:lnTo>
-                  <a:pt x="85389" y="461785"/>
-                </a:lnTo>
-                <a:lnTo>
-                  <a:pt x="110931" y="414000"/>
-                </a:lnTo>
-                <a:lnTo>
-                  <a:pt x="139543" y="367988"/>
-                </a:lnTo>
-                <a:lnTo>
-                  <a:pt x="171103" y="323946"/>
-                </a:lnTo>
-                <a:lnTo>
-                  <a:pt x="205477" y="282062"/>
-                </a:lnTo>
-                <a:lnTo>
-                  <a:pt x="242516" y="242516"/>
-                </a:lnTo>
-                <a:lnTo>
-                  <a:pt x="282062" y="205477"/>
-                </a:lnTo>
-                <a:lnTo>
-                  <a:pt x="323946" y="171103"/>
-                </a:lnTo>
-                <a:lnTo>
-                  <a:pt x="367988" y="139543"/>
-                </a:lnTo>
-                <a:lnTo>
-                  <a:pt x="414000" y="110931"/>
-                </a:lnTo>
-                <a:lnTo>
-                  <a:pt x="461785" y="85389"/>
-                </a:lnTo>
-                <a:lnTo>
-                  <a:pt x="511138" y="63028"/>
-                </a:lnTo>
-                <a:lnTo>
-                  <a:pt x="561848" y="43942"/>
-                </a:lnTo>
-                <a:lnTo>
-                  <a:pt x="613698" y="28213"/>
-                </a:lnTo>
-                <a:lnTo>
-                  <a:pt x="666465" y="15910"/>
-                </a:lnTo>
-                <a:lnTo>
-                  <a:pt x="719924" y="7084"/>
-                </a:lnTo>
-                <a:lnTo>
-                  <a:pt x="773846" y="1773"/>
-                </a:lnTo>
-                <a:lnTo>
-                  <a:pt x="828000" y="0"/>
-                </a:lnTo>
-                <a:close/>
-              </a:path>
-            </a:pathLst>
-          </a:custGeom>
-          <a:solidFill>
-            <a:srgbClr val="FF8B47"/>
-          </a:solidFill>
-          <a:ln>
-            <a:noFill/>
+          </a:prstGeom>
+          <a:ln w="3600">
+            <a:solidFill>
+              <a:srgbClr val="FFD5BD"/>
+            </a:solidFill>
           </a:ln>
         </p:spPr>
-        <p:txBody>
-          <a:bodyPr rtlCol="0" anchor="ctr"/>
-          <a:lstStyle/>
-          <a:p>
-            <a:pPr algn="ctr"/>
-          </a:p>
-        </p:txBody>
-      </p:sp>
-      <p:sp>
-        <p:nvSpPr>
-          <p:cNvPr id="4" name="텍스트"/>
+      </p:cxnSp>
+      <p:sp>
+        <p:nvSpPr>
+          <p:cNvPr id="5" name="텍스트"/>
           <p:cNvSpPr txBox="1"/>
           <p:nvPr/>
         </p:nvSpPr>
         <p:spPr>
           <a:xfrm>
-            <a:off x="252000" y="432000"/>
-            <a:ext cx="2304000" cy="720000"/>
+            <a:off x="252000" y="507600"/>
+            <a:ext cx="216000" cy="95251"/>
           </a:xfrm>
           <a:prstGeom prst="rect">
             <a:avLst/>
@@ -3550,32 +3695,133 @@
           <a:p>
             <a:pPr algn="l">
               <a:lnSpc>
-                <a:spcPts val="1884"/>
+                <a:spcPts val="725"/>
               </a:lnSpc>
             </a:pPr>
             <a:r>
-              <a:rPr sz="1300" b="1">
+              <a:rPr sz="500" b="1" spc="100">
+                <a:solidFill>
+                  <a:srgbClr val="6C3519"/>
+                </a:solidFill>
+                <a:latin typeface="맑은 고딕"/>
+                <a:ea typeface="맑은 고딕"/>
+              </a:rPr>
+              <a:t>01</a:t>
+            </a:r>
+          </a:p>
+        </p:txBody>
+      </p:sp>
+      <p:sp>
+        <p:nvSpPr>
+          <p:cNvPr id="6" name="텍스트"/>
+          <p:cNvSpPr txBox="1"/>
+          <p:nvPr/>
+        </p:nvSpPr>
+        <p:spPr>
+          <a:xfrm>
+            <a:off x="489600" y="496800"/>
+            <a:ext cx="1260000" cy="133351"/>
+          </a:xfrm>
+          <a:prstGeom prst="rect">
+            <a:avLst/>
+          </a:prstGeom>
+          <a:noFill/>
+        </p:spPr>
+        <p:txBody>
+          <a:bodyPr wrap="square" lIns="0" rIns="0" tIns="0" bIns="0" anchor="t">
+            <a:spAutoFit/>
+          </a:bodyPr>
+          <a:lstStyle/>
+          <a:p>
+            <a:pPr algn="l">
+              <a:lnSpc>
+                <a:spcPts val="1015"/>
+              </a:lnSpc>
+            </a:pPr>
+            <a:r>
+              <a:rPr sz="700" b="0">
                 <a:solidFill>
                   <a:srgbClr val="12151C"/>
                 </a:solidFill>
                 <a:latin typeface="맑은 고딕"/>
                 <a:ea typeface="맑은 고딕"/>
               </a:rPr>
-              <a:t>돌봄은 존중에서 시작됩니다</a:t>
-            </a:r>
-          </a:p>
-        </p:txBody>
-      </p:sp>
-      <p:sp>
-        <p:nvSpPr>
-          <p:cNvPr id="5" name="텍스트"/>
+              <a:t>일반 진료</a:t>
+            </a:r>
+          </a:p>
+        </p:txBody>
+      </p:sp>
+      <p:cxnSp>
+        <p:nvCxnSpPr>
+          <p:cNvPr id="7" name="Connector 6"/>
+          <p:cNvCxnSpPr/>
+          <p:nvPr/>
+        </p:nvCxnSpPr>
+        <p:spPr>
+          <a:xfrm>
+            <a:off x="252000" y="640800"/>
+            <a:ext cx="1512000" cy="0"/>
+          </a:xfrm>
+          <a:prstGeom prst="line">
+            <a:avLst/>
+          </a:prstGeom>
+          <a:ln w="3600">
+            <a:solidFill>
+              <a:srgbClr val="FFD5BD"/>
+            </a:solidFill>
+          </a:ln>
+        </p:spPr>
+      </p:cxnSp>
+      <p:sp>
+        <p:nvSpPr>
+          <p:cNvPr id="8" name="텍스트"/>
           <p:cNvSpPr txBox="1"/>
           <p:nvPr/>
         </p:nvSpPr>
         <p:spPr>
           <a:xfrm>
-            <a:off x="252000" y="1476000"/>
-            <a:ext cx="1800000" cy="133351"/>
+            <a:off x="252000" y="694800"/>
+            <a:ext cx="216000" cy="95251"/>
+          </a:xfrm>
+          <a:prstGeom prst="rect">
+            <a:avLst/>
+          </a:prstGeom>
+          <a:noFill/>
+        </p:spPr>
+        <p:txBody>
+          <a:bodyPr wrap="square" lIns="0" rIns="0" tIns="0" bIns="0" anchor="t">
+            <a:spAutoFit/>
+          </a:bodyPr>
+          <a:lstStyle/>
+          <a:p>
+            <a:pPr algn="l">
+              <a:lnSpc>
+                <a:spcPts val="725"/>
+              </a:lnSpc>
+            </a:pPr>
+            <a:r>
+              <a:rPr sz="500" b="1" spc="100">
+                <a:solidFill>
+                  <a:srgbClr val="6C3519"/>
+                </a:solidFill>
+                <a:latin typeface="맑은 고딕"/>
+                <a:ea typeface="맑은 고딕"/>
+              </a:rPr>
+              <a:t>02</a:t>
+            </a:r>
+          </a:p>
+        </p:txBody>
+      </p:sp>
+      <p:sp>
+        <p:nvSpPr>
+          <p:cNvPr id="9" name="텍스트"/>
+          <p:cNvSpPr txBox="1"/>
+          <p:nvPr/>
+        </p:nvSpPr>
+        <p:spPr>
+          <a:xfrm>
+            <a:off x="489600" y="684000"/>
+            <a:ext cx="1260000" cy="133351"/>
           </a:xfrm>
           <a:prstGeom prst="rect">
             <a:avLst/>
@@ -3594,7 +3840,484 @@
               </a:lnSpc>
             </a:pPr>
             <a:r>
-              <a:rPr sz="700" b="1" spc="200">
+              <a:rPr sz="700" b="0">
+                <a:solidFill>
+                  <a:srgbClr val="12151C"/>
+                </a:solidFill>
+                <a:latin typeface="맑은 고딕"/>
+                <a:ea typeface="맑은 고딕"/>
+              </a:rPr>
+              <a:t>복약 상담</a:t>
+            </a:r>
+          </a:p>
+        </p:txBody>
+      </p:sp>
+      <p:cxnSp>
+        <p:nvCxnSpPr>
+          <p:cNvPr id="10" name="Connector 9"/>
+          <p:cNvCxnSpPr/>
+          <p:nvPr/>
+        </p:nvCxnSpPr>
+        <p:spPr>
+          <a:xfrm>
+            <a:off x="252000" y="828000"/>
+            <a:ext cx="1512000" cy="0"/>
+          </a:xfrm>
+          <a:prstGeom prst="line">
+            <a:avLst/>
+          </a:prstGeom>
+          <a:ln w="3600">
+            <a:solidFill>
+              <a:srgbClr val="FFD5BD"/>
+            </a:solidFill>
+          </a:ln>
+        </p:spPr>
+      </p:cxnSp>
+      <p:sp>
+        <p:nvSpPr>
+          <p:cNvPr id="11" name="텍스트"/>
+          <p:cNvSpPr txBox="1"/>
+          <p:nvPr/>
+        </p:nvSpPr>
+        <p:spPr>
+          <a:xfrm>
+            <a:off x="252000" y="882000"/>
+            <a:ext cx="216000" cy="95251"/>
+          </a:xfrm>
+          <a:prstGeom prst="rect">
+            <a:avLst/>
+          </a:prstGeom>
+          <a:noFill/>
+        </p:spPr>
+        <p:txBody>
+          <a:bodyPr wrap="square" lIns="0" rIns="0" tIns="0" bIns="0" anchor="t">
+            <a:spAutoFit/>
+          </a:bodyPr>
+          <a:lstStyle/>
+          <a:p>
+            <a:pPr algn="l">
+              <a:lnSpc>
+                <a:spcPts val="725"/>
+              </a:lnSpc>
+            </a:pPr>
+            <a:r>
+              <a:rPr sz="500" b="1" spc="100">
+                <a:solidFill>
+                  <a:srgbClr val="6C3519"/>
+                </a:solidFill>
+                <a:latin typeface="맑은 고딕"/>
+                <a:ea typeface="맑은 고딕"/>
+              </a:rPr>
+              <a:t>03</a:t>
+            </a:r>
+          </a:p>
+        </p:txBody>
+      </p:sp>
+      <p:sp>
+        <p:nvSpPr>
+          <p:cNvPr id="12" name="텍스트"/>
+          <p:cNvSpPr txBox="1"/>
+          <p:nvPr/>
+        </p:nvSpPr>
+        <p:spPr>
+          <a:xfrm>
+            <a:off x="489600" y="871200"/>
+            <a:ext cx="1260000" cy="133351"/>
+          </a:xfrm>
+          <a:prstGeom prst="rect">
+            <a:avLst/>
+          </a:prstGeom>
+          <a:noFill/>
+        </p:spPr>
+        <p:txBody>
+          <a:bodyPr wrap="square" lIns="0" rIns="0" tIns="0" bIns="0" anchor="t">
+            <a:spAutoFit/>
+          </a:bodyPr>
+          <a:lstStyle/>
+          <a:p>
+            <a:pPr algn="l">
+              <a:lnSpc>
+                <a:spcPts val="1015"/>
+              </a:lnSpc>
+            </a:pPr>
+            <a:r>
+              <a:rPr sz="700" b="0">
+                <a:solidFill>
+                  <a:srgbClr val="12151C"/>
+                </a:solidFill>
+                <a:latin typeface="맑은 고딕"/>
+                <a:ea typeface="맑은 고딕"/>
+              </a:rPr>
+              <a:t>물리 치료</a:t>
+            </a:r>
+          </a:p>
+        </p:txBody>
+      </p:sp>
+      <p:cxnSp>
+        <p:nvCxnSpPr>
+          <p:cNvPr id="13" name="Connector 12"/>
+          <p:cNvCxnSpPr/>
+          <p:nvPr/>
+        </p:nvCxnSpPr>
+        <p:spPr>
+          <a:xfrm>
+            <a:off x="252000" y="1015200"/>
+            <a:ext cx="1512000" cy="0"/>
+          </a:xfrm>
+          <a:prstGeom prst="line">
+            <a:avLst/>
+          </a:prstGeom>
+          <a:ln w="3600">
+            <a:solidFill>
+              <a:srgbClr val="FFD5BD"/>
+            </a:solidFill>
+          </a:ln>
+        </p:spPr>
+      </p:cxnSp>
+      <p:sp>
+        <p:nvSpPr>
+          <p:cNvPr id="14" name="텍스트"/>
+          <p:cNvSpPr txBox="1"/>
+          <p:nvPr/>
+        </p:nvSpPr>
+        <p:spPr>
+          <a:xfrm>
+            <a:off x="252000" y="1069200"/>
+            <a:ext cx="216000" cy="95251"/>
+          </a:xfrm>
+          <a:prstGeom prst="rect">
+            <a:avLst/>
+          </a:prstGeom>
+          <a:noFill/>
+        </p:spPr>
+        <p:txBody>
+          <a:bodyPr wrap="square" lIns="0" rIns="0" tIns="0" bIns="0" anchor="t">
+            <a:spAutoFit/>
+          </a:bodyPr>
+          <a:lstStyle/>
+          <a:p>
+            <a:pPr algn="l">
+              <a:lnSpc>
+                <a:spcPts val="725"/>
+              </a:lnSpc>
+            </a:pPr>
+            <a:r>
+              <a:rPr sz="500" b="1" spc="100">
+                <a:solidFill>
+                  <a:srgbClr val="6C3519"/>
+                </a:solidFill>
+                <a:latin typeface="맑은 고딕"/>
+                <a:ea typeface="맑은 고딕"/>
+              </a:rPr>
+              <a:t>04</a:t>
+            </a:r>
+          </a:p>
+        </p:txBody>
+      </p:sp>
+      <p:sp>
+        <p:nvSpPr>
+          <p:cNvPr id="15" name="텍스트"/>
+          <p:cNvSpPr txBox="1"/>
+          <p:nvPr/>
+        </p:nvSpPr>
+        <p:spPr>
+          <a:xfrm>
+            <a:off x="489600" y="1058400"/>
+            <a:ext cx="1260000" cy="133351"/>
+          </a:xfrm>
+          <a:prstGeom prst="rect">
+            <a:avLst/>
+          </a:prstGeom>
+          <a:noFill/>
+        </p:spPr>
+        <p:txBody>
+          <a:bodyPr wrap="square" lIns="0" rIns="0" tIns="0" bIns="0" anchor="t">
+            <a:spAutoFit/>
+          </a:bodyPr>
+          <a:lstStyle/>
+          <a:p>
+            <a:pPr algn="l">
+              <a:lnSpc>
+                <a:spcPts val="1015"/>
+              </a:lnSpc>
+            </a:pPr>
+            <a:r>
+              <a:rPr sz="700" b="0">
+                <a:solidFill>
+                  <a:srgbClr val="12151C"/>
+                </a:solidFill>
+                <a:latin typeface="맑은 고딕"/>
+                <a:ea typeface="맑은 고딕"/>
+              </a:rPr>
+              <a:t>예약 문의</a:t>
+            </a:r>
+          </a:p>
+        </p:txBody>
+      </p:sp>
+      <p:cxnSp>
+        <p:nvCxnSpPr>
+          <p:cNvPr id="16" name="Connector 15"/>
+          <p:cNvCxnSpPr/>
+          <p:nvPr/>
+        </p:nvCxnSpPr>
+        <p:spPr>
+          <a:xfrm>
+            <a:off x="252000" y="1202400"/>
+            <a:ext cx="1512000" cy="0"/>
+          </a:xfrm>
+          <a:prstGeom prst="line">
+            <a:avLst/>
+          </a:prstGeom>
+          <a:ln w="3600">
+            <a:solidFill>
+              <a:srgbClr val="FFD5BD"/>
+            </a:solidFill>
+          </a:ln>
+        </p:spPr>
+      </p:cxnSp>
+      <p:sp>
+        <p:nvSpPr>
+          <p:cNvPr id="17" name="Rectangle 16"/>
+          <p:cNvSpPr/>
+          <p:nvPr/>
+        </p:nvSpPr>
+        <p:spPr>
+          <a:xfrm>
+            <a:off x="2088000" y="252000"/>
+            <a:ext cx="900000" cy="1296000"/>
+          </a:xfrm>
+          <a:prstGeom prst="rect">
+            <a:avLst/>
+          </a:prstGeom>
+          <a:solidFill>
+            <a:srgbClr val="FF6A13"/>
+          </a:solidFill>
+          <a:ln>
+            <a:noFill/>
+          </a:ln>
+        </p:spPr>
+        <p:txBody>
+          <a:bodyPr rtlCol="0" anchor="ctr"/>
+          <a:lstStyle/>
+          <a:p>
+            <a:pPr algn="ctr"/>
+          </a:p>
+        </p:txBody>
+      </p:sp>
+      <p:sp>
+        <p:nvSpPr>
+          <p:cNvPr id="18" name="텍스트"/>
+          <p:cNvSpPr txBox="1"/>
+          <p:nvPr/>
+        </p:nvSpPr>
+        <p:spPr>
+          <a:xfrm>
+            <a:off x="2196000" y="360000"/>
+            <a:ext cx="684000" cy="95251"/>
+          </a:xfrm>
+          <a:prstGeom prst="rect">
+            <a:avLst/>
+          </a:prstGeom>
+          <a:noFill/>
+        </p:spPr>
+        <p:txBody>
+          <a:bodyPr wrap="square" lIns="0" rIns="0" tIns="0" bIns="0" anchor="t">
+            <a:spAutoFit/>
+          </a:bodyPr>
+          <a:lstStyle/>
+          <a:p>
+            <a:pPr algn="l">
+              <a:lnSpc>
+                <a:spcPts val="725"/>
+              </a:lnSpc>
+            </a:pPr>
+            <a:r>
+              <a:rPr sz="500" b="1" spc="240">
+                <a:solidFill>
+                  <a:srgbClr val="12151C">
+                    <a:alpha val="75000"/>
+                  </a:srgbClr>
+                </a:solidFill>
+                <a:latin typeface="맑은 고딕"/>
+                <a:ea typeface="맑은 고딕"/>
+              </a:rPr>
+              <a:t>INFO</a:t>
+            </a:r>
+          </a:p>
+        </p:txBody>
+      </p:sp>
+      <p:sp>
+        <p:nvSpPr>
+          <p:cNvPr id="19" name="텍스트"/>
+          <p:cNvSpPr txBox="1"/>
+          <p:nvPr/>
+        </p:nvSpPr>
+        <p:spPr>
+          <a:xfrm>
+            <a:off x="2196000" y="504000"/>
+            <a:ext cx="684000" cy="121921"/>
+          </a:xfrm>
+          <a:prstGeom prst="rect">
+            <a:avLst/>
+          </a:prstGeom>
+          <a:noFill/>
+        </p:spPr>
+        <p:txBody>
+          <a:bodyPr wrap="square" lIns="0" rIns="0" tIns="0" bIns="0" anchor="t">
+            <a:spAutoFit/>
+          </a:bodyPr>
+          <a:lstStyle/>
+          <a:p>
+            <a:pPr algn="l">
+              <a:lnSpc>
+                <a:spcPts val="927"/>
+              </a:lnSpc>
+            </a:pPr>
+            <a:r>
+              <a:rPr sz="640" b="1">
+                <a:solidFill>
+                  <a:srgbClr val="12151C"/>
+                </a:solidFill>
+                <a:latin typeface="맑은 고딕"/>
+                <a:ea typeface="맑은 고딕"/>
+              </a:rPr>
+              <a:t>토 09:00 – 13:00</a:t>
+            </a:r>
+          </a:p>
+        </p:txBody>
+      </p:sp>
+      <p:cxnSp>
+        <p:nvCxnSpPr>
+          <p:cNvPr id="20" name="Connector 19"/>
+          <p:cNvCxnSpPr/>
+          <p:nvPr/>
+        </p:nvCxnSpPr>
+        <p:spPr>
+          <a:xfrm>
+            <a:off x="2196000" y="770400"/>
+            <a:ext cx="684000" cy="0"/>
+          </a:xfrm>
+          <a:prstGeom prst="line">
+            <a:avLst/>
+          </a:prstGeom>
+          <a:ln w="3600">
+            <a:solidFill>
+              <a:srgbClr val="12151C"/>
+            </a:solidFill>
+          </a:ln>
+        </p:spPr>
+      </p:cxnSp>
+      <p:sp>
+        <p:nvSpPr>
+          <p:cNvPr id="21" name="텍스트"/>
+          <p:cNvSpPr txBox="1"/>
+          <p:nvPr/>
+        </p:nvSpPr>
+        <p:spPr>
+          <a:xfrm>
+            <a:off x="2196000" y="849600"/>
+            <a:ext cx="684000" cy="91441"/>
+          </a:xfrm>
+          <a:prstGeom prst="rect">
+            <a:avLst/>
+          </a:prstGeom>
+          <a:noFill/>
+        </p:spPr>
+        <p:txBody>
+          <a:bodyPr wrap="square" lIns="0" rIns="0" tIns="0" bIns="0" anchor="t">
+            <a:spAutoFit/>
+          </a:bodyPr>
+          <a:lstStyle/>
+          <a:p>
+            <a:pPr algn="l">
+              <a:lnSpc>
+                <a:spcPts val="696"/>
+              </a:lnSpc>
+            </a:pPr>
+            <a:r>
+              <a:rPr sz="480" b="1" spc="140">
+                <a:solidFill>
+                  <a:srgbClr val="12151C">
+                    <a:alpha val="75000"/>
+                  </a:srgbClr>
+                </a:solidFill>
+                <a:latin typeface="맑은 고딕"/>
+                <a:ea typeface="맑은 고딕"/>
+              </a:rPr>
+              <a:t>INSTAGRAM</a:t>
+            </a:r>
+          </a:p>
+        </p:txBody>
+      </p:sp>
+      <p:sp>
+        <p:nvSpPr>
+          <p:cNvPr id="22" name="텍스트"/>
+          <p:cNvSpPr txBox="1"/>
+          <p:nvPr/>
+        </p:nvSpPr>
+        <p:spPr>
+          <a:xfrm>
+            <a:off x="2196000" y="957600"/>
+            <a:ext cx="684000" cy="121921"/>
+          </a:xfrm>
+          <a:prstGeom prst="rect">
+            <a:avLst/>
+          </a:prstGeom>
+          <a:noFill/>
+        </p:spPr>
+        <p:txBody>
+          <a:bodyPr wrap="square" lIns="0" rIns="0" tIns="0" bIns="0" anchor="t">
+            <a:spAutoFit/>
+          </a:bodyPr>
+          <a:lstStyle/>
+          <a:p>
+            <a:pPr algn="l">
+              <a:lnSpc>
+                <a:spcPts val="927"/>
+              </a:lnSpc>
+            </a:pPr>
+            <a:r>
+              <a:rPr sz="640" b="1">
+                <a:solidFill>
+                  <a:srgbClr val="12151C"/>
+                </a:solidFill>
+                <a:latin typeface="맑은 고딕"/>
+                <a:ea typeface="맑은 고딕"/>
+              </a:rPr>
+              <a:t>@아이디</a:t>
+            </a:r>
+          </a:p>
+        </p:txBody>
+      </p:sp>
+      <p:sp>
+        <p:nvSpPr>
+          <p:cNvPr id="23" name="텍스트"/>
+          <p:cNvSpPr txBox="1"/>
+          <p:nvPr/>
+        </p:nvSpPr>
+        <p:spPr>
+          <a:xfrm>
+            <a:off x="2196000" y="1368000"/>
+            <a:ext cx="720000" cy="106681"/>
+          </a:xfrm>
+          <a:prstGeom prst="rect">
+            <a:avLst/>
+          </a:prstGeom>
+          <a:noFill/>
+        </p:spPr>
+        <p:txBody>
+          <a:bodyPr wrap="square" lIns="0" rIns="0" tIns="0" bIns="0" anchor="t">
+            <a:spAutoFit/>
+          </a:bodyPr>
+          <a:lstStyle/>
+          <a:p>
+            <a:pPr algn="l">
+              <a:lnSpc>
+                <a:spcPts val="811"/>
+              </a:lnSpc>
+            </a:pPr>
+            <a:r>
+              <a:rPr sz="560" b="1" spc="80">
                 <a:solidFill>
                   <a:srgbClr val="12151C"/>
                 </a:solidFill>
